--- a/docs/reference_materials/powerpoints/6-30 REU.pptx
+++ b/docs/reference_materials/powerpoints/6-30 REU.pptx
@@ -324,7 +324,7 @@
               <a:pPr>
                 <a:defRPr/>
               </a:pPr>
-              <a:t>6/29/2026</a:t>
+              <a:t>6/30/2026</a:t>
             </a:fld>
             <a:endParaRPr lang="en-US"/>
           </a:p>
@@ -1776,6 +1776,37 @@
           <a:bodyPr/>
           <a:lstStyle/>
           <a:p>
+            <a:pPr marL="171450" marR="0" lvl="0" indent="-171450" algn="l" defTabSz="914400" rtl="0" eaLnBrk="0" fontAlgn="base" latinLnBrk="0" hangingPunct="0">
+              <a:lnSpc>
+                <a:spcPct val="100000"/>
+              </a:lnSpc>
+              <a:spcBef>
+                <a:spcPct val="30000"/>
+              </a:spcBef>
+              <a:spcAft>
+                <a:spcPct val="0"/>
+              </a:spcAft>
+              <a:buClrTx/>
+              <a:buSzTx/>
+              <a:buFontTx/>
+              <a:buChar char="-"/>
+              <a:tabLst/>
+              <a:defRPr/>
+            </a:pPr>
+            <a:r>
+              <a:rPr lang="en-US" sz="1200" i="1" dirty="0">
+                <a:solidFill>
+                  <a:srgbClr val="555555"/>
+                </a:solidFill>
+                <a:latin typeface="Calibri" pitchFamily="34" charset="0"/>
+                <a:ea typeface="Calibri" pitchFamily="34" charset="-122"/>
+                <a:cs typeface="Calibri" pitchFamily="34" charset="-120"/>
+              </a:rPr>
+              <a:t>Interpretation: Weighted edges preserve real graph information and improve out-of-distribution behavior somewhat, but do not move the held-out test ceiling. Retained for all future runs.</a:t>
+            </a:r>
+            <a:endParaRPr lang="en-US" sz="1200" dirty="0"/>
+          </a:p>
+          <a:p>
             <a:pPr marL="171450" indent="-171450">
               <a:buFontTx/>
               <a:buChar char="-"/>
@@ -1893,6 +1924,37 @@
         <p:txBody>
           <a:bodyPr/>
           <a:lstStyle/>
+          <a:p>
+            <a:pPr marL="171450" marR="0" lvl="0" indent="-171450" algn="l" defTabSz="914400" rtl="0" eaLnBrk="0" fontAlgn="base" latinLnBrk="0" hangingPunct="0">
+              <a:lnSpc>
+                <a:spcPct val="100000"/>
+              </a:lnSpc>
+              <a:spcBef>
+                <a:spcPct val="30000"/>
+              </a:spcBef>
+              <a:spcAft>
+                <a:spcPct val="0"/>
+              </a:spcAft>
+              <a:buClrTx/>
+              <a:buSzTx/>
+              <a:buFontTx/>
+              <a:buChar char="-"/>
+              <a:tabLst/>
+              <a:defRPr/>
+            </a:pPr>
+            <a:r>
+              <a:rPr lang="en-US" sz="1200" i="1" dirty="0">
+                <a:solidFill>
+                  <a:srgbClr val="555555"/>
+                </a:solidFill>
+                <a:latin typeface="Calibri" pitchFamily="34" charset="0"/>
+                <a:ea typeface="Calibri" pitchFamily="34" charset="-122"/>
+                <a:cs typeface="Calibri" pitchFamily="34" charset="-120"/>
+              </a:rPr>
+              <a:t>Strongest single improvement. Confirmed stable across multiple seeds (mean test R²: 0.9380). Best prediction-set generalization baseline.</a:t>
+            </a:r>
+            <a:endParaRPr lang="en-US" sz="1200" dirty="0"/>
+          </a:p>
           <a:p>
             <a:pPr marL="171450" indent="-171450">
               <a:buFontTx/>
@@ -3670,20 +3732,11 @@
             </a:lvl9pPr>
           </a:lstStyle>
           <a:p>
-            <a:pPr algn="ctr" eaLnBrk="1" hangingPunct="1">
-              <a:spcBef>
-                <a:spcPct val="50000"/>
-              </a:spcBef>
-            </a:pPr>
+            <a:pPr algn="ctr" eaLnBrk="1" hangingPunct="1"/>
             <a:r>
               <a:rPr lang="en-US" altLang="en-US" sz="2800" b="1" dirty="0"/>
-              <a:t>Simplified Use-Case of Graph Neural Networks (GNNs) for Predicting Synthetic Lattice Stability </a:t>
-            </a:r>
-            <a:endParaRPr lang="en-US" altLang="en-US" sz="2800" dirty="0">
-              <a:solidFill>
-                <a:srgbClr val="000000"/>
-              </a:solidFill>
-            </a:endParaRPr>
+              <a:t>Graph Convolution Network (GCN) Voronoi Lattice Stiffness Optimization Progress Report</a:t>
+            </a:r>
           </a:p>
         </p:txBody>
       </p:sp>
@@ -6124,7 +6177,7 @@
                 <a:ea typeface="Calibri" pitchFamily="34" charset="-122"/>
                 <a:cs typeface="Calibri" pitchFamily="34" charset="-120"/>
               </a:rPr>
-              <a:t>Weighted edges are worth keeping — they preserve real graph structure.</a:t>
+              <a:t>Weighted edges are worth keeping as they preserve real graph structure.</a:t>
             </a:r>
             <a:endParaRPr lang="en-US" sz="1300" dirty="0"/>
           </a:p>
@@ -7166,7 +7219,7 @@
                 <a:ea typeface="Calibri" pitchFamily="34" charset="-122"/>
                 <a:cs typeface="Calibri" pitchFamily="34" charset="-120"/>
               </a:rPr>
-              <a:t>Graph Isomorphism Network — more expressive message passing</a:t>
+              <a:t>Graph Isomorphism Network, more expressive message passing</a:t>
             </a:r>
             <a:endParaRPr lang="en-US" sz="1200" dirty="0"/>
           </a:p>
@@ -9025,7 +9078,7 @@
                 <a:ea typeface="Calibri" pitchFamily="34" charset="-122"/>
                 <a:cs typeface="Calibri" pitchFamily="34" charset="-120"/>
               </a:rPr>
-              <a:t>All optimizers performed much worse than baseline  —  results were not clean</a:t>
+              <a:t>All optimizers performed much worse than</a:t>
             </a:r>
             <a:endParaRPr lang="en-US" sz="1400" dirty="0"/>
           </a:p>
@@ -11371,7 +11424,7 @@
         </p:nvSpPr>
         <p:spPr>
           <a:xfrm>
-            <a:off x="457200" y="777240"/>
+            <a:off x="457200" y="1676400"/>
             <a:ext cx="8229600" cy="347472"/>
           </a:xfrm>
           <a:prstGeom prst="rect">
@@ -11396,7 +11449,7 @@
                 <a:ea typeface="Calibri" pitchFamily="34" charset="-122"/>
                 <a:cs typeface="Calibri" pitchFamily="34" charset="-120"/>
               </a:rPr>
-              <a:t>Node Features Added (derived from existing data at load time)</a:t>
+              <a:t>Node Features Added</a:t>
             </a:r>
             <a:endParaRPr lang="en-US" sz="1700" dirty="0"/>
           </a:p>
@@ -11416,7 +11469,7 @@
         </p:nvSpPr>
         <p:spPr>
           <a:xfrm>
-            <a:off x="457200" y="1161288"/>
+            <a:off x="457200" y="2060448"/>
             <a:ext cx="4206240" cy="2377440"/>
           </a:xfrm>
           <a:prstGeom prst="rect">
@@ -11588,7 +11641,7 @@
         </p:nvSpPr>
         <p:spPr>
           <a:xfrm>
-            <a:off x="4846320" y="777240"/>
+            <a:off x="4846320" y="1676400"/>
             <a:ext cx="4023360" cy="347472"/>
           </a:xfrm>
           <a:prstGeom prst="rect">
@@ -11633,7 +11686,7 @@
         </p:nvSpPr>
         <p:spPr>
           <a:xfrm>
-            <a:off x="4846320" y="1161288"/>
+            <a:off x="4846320" y="2060448"/>
             <a:ext cx="1828800" cy="1234440"/>
           </a:xfrm>
           <a:prstGeom prst="roundRect">
@@ -11666,7 +11719,7 @@
         </p:nvSpPr>
         <p:spPr>
           <a:xfrm>
-            <a:off x="4846320" y="1234440"/>
+            <a:off x="4846320" y="2133600"/>
             <a:ext cx="1828800" cy="274320"/>
           </a:xfrm>
           <a:prstGeom prst="rect">
@@ -11711,7 +11764,7 @@
         </p:nvSpPr>
         <p:spPr>
           <a:xfrm>
-            <a:off x="4846320" y="1508760"/>
+            <a:off x="4846320" y="2407920"/>
             <a:ext cx="1828800" cy="256032"/>
           </a:xfrm>
           <a:prstGeom prst="rect">
@@ -11756,7 +11809,7 @@
         </p:nvSpPr>
         <p:spPr>
           <a:xfrm>
-            <a:off x="4846320" y="1764792"/>
+            <a:off x="4846320" y="2663952"/>
             <a:ext cx="1828800" cy="384048"/>
           </a:xfrm>
           <a:prstGeom prst="rect">
@@ -11801,7 +11854,7 @@
         </p:nvSpPr>
         <p:spPr>
           <a:xfrm>
-            <a:off x="6858000" y="1161288"/>
+            <a:off x="6858000" y="2060448"/>
             <a:ext cx="1828800" cy="1234440"/>
           </a:xfrm>
           <a:prstGeom prst="roundRect">
@@ -11834,7 +11887,7 @@
         </p:nvSpPr>
         <p:spPr>
           <a:xfrm>
-            <a:off x="6858000" y="1234440"/>
+            <a:off x="6858000" y="2133600"/>
             <a:ext cx="1828800" cy="274320"/>
           </a:xfrm>
           <a:prstGeom prst="rect">
@@ -11879,7 +11932,7 @@
         </p:nvSpPr>
         <p:spPr>
           <a:xfrm>
-            <a:off x="6858000" y="1508760"/>
+            <a:off x="6858000" y="2407920"/>
             <a:ext cx="1828800" cy="256032"/>
           </a:xfrm>
           <a:prstGeom prst="rect">
@@ -11924,7 +11977,7 @@
         </p:nvSpPr>
         <p:spPr>
           <a:xfrm>
-            <a:off x="6858000" y="1764792"/>
+            <a:off x="6858000" y="2663952"/>
             <a:ext cx="1828800" cy="384048"/>
           </a:xfrm>
           <a:prstGeom prst="rect">
@@ -11969,7 +12022,7 @@
         </p:nvSpPr>
         <p:spPr>
           <a:xfrm>
-            <a:off x="4846320" y="2578608"/>
+            <a:off x="4846320" y="3477768"/>
             <a:ext cx="1828800" cy="1234440"/>
           </a:xfrm>
           <a:prstGeom prst="roundRect">
@@ -12002,7 +12055,7 @@
         </p:nvSpPr>
         <p:spPr>
           <a:xfrm>
-            <a:off x="4846320" y="2651760"/>
+            <a:off x="4846320" y="3550920"/>
             <a:ext cx="1828800" cy="274320"/>
           </a:xfrm>
           <a:prstGeom prst="rect">
@@ -12047,7 +12100,7 @@
         </p:nvSpPr>
         <p:spPr>
           <a:xfrm>
-            <a:off x="4846320" y="2926080"/>
+            <a:off x="4846320" y="3825240"/>
             <a:ext cx="1828800" cy="256032"/>
           </a:xfrm>
           <a:prstGeom prst="rect">
@@ -12092,7 +12145,7 @@
         </p:nvSpPr>
         <p:spPr>
           <a:xfrm>
-            <a:off x="4846320" y="3182112"/>
+            <a:off x="4846320" y="4081272"/>
             <a:ext cx="1828800" cy="384048"/>
           </a:xfrm>
           <a:prstGeom prst="rect">
@@ -12137,7 +12190,7 @@
         </p:nvSpPr>
         <p:spPr>
           <a:xfrm>
-            <a:off x="6858000" y="2578608"/>
+            <a:off x="6858000" y="3477768"/>
             <a:ext cx="1828800" cy="1234440"/>
           </a:xfrm>
           <a:prstGeom prst="roundRect">
@@ -12170,7 +12223,7 @@
         </p:nvSpPr>
         <p:spPr>
           <a:xfrm>
-            <a:off x="6858000" y="2651760"/>
+            <a:off x="6858000" y="3550920"/>
             <a:ext cx="1828800" cy="274320"/>
           </a:xfrm>
           <a:prstGeom prst="rect">
@@ -12215,7 +12268,7 @@
         </p:nvSpPr>
         <p:spPr>
           <a:xfrm>
-            <a:off x="6858000" y="2926080"/>
+            <a:off x="6858000" y="3825240"/>
             <a:ext cx="1828800" cy="256032"/>
           </a:xfrm>
           <a:prstGeom prst="rect">
@@ -12260,7 +12313,7 @@
         </p:nvSpPr>
         <p:spPr>
           <a:xfrm>
-            <a:off x="6858000" y="3182112"/>
+            <a:off x="6858000" y="4081272"/>
             <a:ext cx="1828800" cy="384048"/>
           </a:xfrm>
           <a:prstGeom prst="rect">
@@ -12288,51 +12341,6 @@
               <a:t>0.002448</a:t>
             </a:r>
             <a:endParaRPr lang="en-US" sz="2200" dirty="0"/>
-          </a:p>
-        </p:txBody>
-      </p:sp>
-      <p:sp>
-        <p:nvSpPr>
-          <p:cNvPr id="87" name="Text 23">
-            <a:extLst>
-              <a:ext uri="{FF2B5EF4-FFF2-40B4-BE49-F238E27FC236}">
-                <a16:creationId xmlns:a16="http://schemas.microsoft.com/office/drawing/2014/main" id="{EA03320B-9703-C793-A83A-587133C6F0D0}"/>
-              </a:ext>
-            </a:extLst>
-          </p:cNvPr>
-          <p:cNvSpPr/>
-          <p:nvPr/>
-        </p:nvSpPr>
-        <p:spPr>
-          <a:xfrm>
-            <a:off x="457200" y="4663440"/>
-            <a:ext cx="8412480" cy="347472"/>
-          </a:xfrm>
-          <a:prstGeom prst="rect">
-            <a:avLst/>
-          </a:prstGeom>
-          <a:noFill/>
-          <a:ln/>
-        </p:spPr>
-        <p:txBody>
-          <a:bodyPr wrap="square" rtlCol="0" anchor="ctr"/>
-          <a:lstStyle/>
-          <a:p>
-            <a:pPr marL="0" indent="0">
-              <a:buNone/>
-            </a:pPr>
-            <a:r>
-              <a:rPr lang="en-US" sz="1200" i="1" dirty="0">
-                <a:solidFill>
-                  <a:srgbClr val="555555"/>
-                </a:solidFill>
-                <a:latin typeface="Calibri" pitchFamily="34" charset="0"/>
-                <a:ea typeface="Calibri" pitchFamily="34" charset="-122"/>
-                <a:cs typeface="Calibri" pitchFamily="34" charset="-120"/>
-              </a:rPr>
-              <a:t>Strongest single improvement. Confirmed stable across multiple seeds (mean test R²: 0.9380). Best prediction-set generalization baseline.</a:t>
-            </a:r>
-            <a:endParaRPr lang="en-US" sz="1200" dirty="0"/>
           </a:p>
         </p:txBody>
       </p:sp>
@@ -12475,7 +12483,7 @@
         </p:nvSpPr>
         <p:spPr>
           <a:xfrm>
-            <a:off x="457200" y="777240"/>
+            <a:off x="457200" y="1219200"/>
             <a:ext cx="8229600" cy="347472"/>
           </a:xfrm>
           <a:prstGeom prst="rect">
@@ -12520,7 +12528,7 @@
         </p:nvSpPr>
         <p:spPr>
           <a:xfrm>
-            <a:off x="457200" y="1143000"/>
+            <a:off x="457200" y="1584960"/>
             <a:ext cx="8229600" cy="438912"/>
           </a:xfrm>
           <a:prstGeom prst="rect">
@@ -12565,7 +12573,7 @@
         </p:nvSpPr>
         <p:spPr>
           <a:xfrm>
-            <a:off x="457200" y="1691640"/>
+            <a:off x="457200" y="2133600"/>
             <a:ext cx="8229600" cy="347472"/>
           </a:xfrm>
           <a:prstGeom prst="rect">
@@ -12610,7 +12618,7 @@
         </p:nvSpPr>
         <p:spPr>
           <a:xfrm>
-            <a:off x="457200" y="2103120"/>
+            <a:off x="457200" y="2545080"/>
             <a:ext cx="1920240" cy="1188720"/>
           </a:xfrm>
           <a:prstGeom prst="roundRect">
@@ -12643,7 +12651,7 @@
         </p:nvSpPr>
         <p:spPr>
           <a:xfrm>
-            <a:off x="457200" y="2240280"/>
+            <a:off x="457200" y="2682240"/>
             <a:ext cx="1920240" cy="566928"/>
           </a:xfrm>
           <a:prstGeom prst="rect">
@@ -12688,7 +12696,7 @@
         </p:nvSpPr>
         <p:spPr>
           <a:xfrm>
-            <a:off x="457200" y="2761488"/>
+            <a:off x="457200" y="3203448"/>
             <a:ext cx="1920240" cy="411480"/>
           </a:xfrm>
           <a:prstGeom prst="rect">
@@ -12733,7 +12741,7 @@
         </p:nvSpPr>
         <p:spPr>
           <a:xfrm>
-            <a:off x="2606040" y="2103120"/>
+            <a:off x="2606040" y="2545080"/>
             <a:ext cx="1920240" cy="1188720"/>
           </a:xfrm>
           <a:prstGeom prst="roundRect">
@@ -12766,7 +12774,7 @@
         </p:nvSpPr>
         <p:spPr>
           <a:xfrm>
-            <a:off x="2606040" y="2240280"/>
+            <a:off x="2606040" y="2682240"/>
             <a:ext cx="1920240" cy="566928"/>
           </a:xfrm>
           <a:prstGeom prst="rect">
@@ -12811,7 +12819,7 @@
         </p:nvSpPr>
         <p:spPr>
           <a:xfrm>
-            <a:off x="2606040" y="2761488"/>
+            <a:off x="2606040" y="3203448"/>
             <a:ext cx="1920240" cy="411480"/>
           </a:xfrm>
           <a:prstGeom prst="rect">
@@ -12856,7 +12864,7 @@
         </p:nvSpPr>
         <p:spPr>
           <a:xfrm>
-            <a:off x="4754880" y="2103120"/>
+            <a:off x="4754880" y="2545080"/>
             <a:ext cx="1920240" cy="1188720"/>
           </a:xfrm>
           <a:prstGeom prst="roundRect">
@@ -12889,7 +12897,7 @@
         </p:nvSpPr>
         <p:spPr>
           <a:xfrm>
-            <a:off x="4754880" y="2240280"/>
+            <a:off x="4754880" y="2682240"/>
             <a:ext cx="1920240" cy="566928"/>
           </a:xfrm>
           <a:prstGeom prst="rect">
@@ -12934,7 +12942,7 @@
         </p:nvSpPr>
         <p:spPr>
           <a:xfrm>
-            <a:off x="4754880" y="2761488"/>
+            <a:off x="4754880" y="3203448"/>
             <a:ext cx="1920240" cy="411480"/>
           </a:xfrm>
           <a:prstGeom prst="rect">
@@ -12979,7 +12987,7 @@
         </p:nvSpPr>
         <p:spPr>
           <a:xfrm>
-            <a:off x="6903720" y="2103120"/>
+            <a:off x="6903720" y="2545080"/>
             <a:ext cx="1920240" cy="1188720"/>
           </a:xfrm>
           <a:prstGeom prst="roundRect">
@@ -13012,7 +13020,7 @@
         </p:nvSpPr>
         <p:spPr>
           <a:xfrm>
-            <a:off x="6903720" y="2240280"/>
+            <a:off x="6903720" y="2682240"/>
             <a:ext cx="1920240" cy="566928"/>
           </a:xfrm>
           <a:prstGeom prst="rect">
@@ -13057,7 +13065,7 @@
         </p:nvSpPr>
         <p:spPr>
           <a:xfrm>
-            <a:off x="6903720" y="2761488"/>
+            <a:off x="6903720" y="3203448"/>
             <a:ext cx="1920240" cy="411480"/>
           </a:xfrm>
           <a:prstGeom prst="rect">
@@ -13102,7 +13110,7 @@
         </p:nvSpPr>
         <p:spPr>
           <a:xfrm>
-            <a:off x="457200" y="3401568"/>
+            <a:off x="457200" y="3843528"/>
             <a:ext cx="8229600" cy="320040"/>
           </a:xfrm>
           <a:prstGeom prst="rect">
@@ -13147,7 +13155,7 @@
         </p:nvSpPr>
         <p:spPr>
           <a:xfrm>
-            <a:off x="457200" y="3749040"/>
+            <a:off x="457200" y="4191000"/>
             <a:ext cx="8229600" cy="1188720"/>
           </a:xfrm>
           <a:prstGeom prst="rect">
@@ -13309,7 +13317,7 @@
         <p:spPr>
           <a:xfrm>
             <a:off x="2209800" y="58271"/>
-            <a:ext cx="7014869" cy="584775"/>
+            <a:ext cx="6173550" cy="523220"/>
           </a:xfrm>
           <a:prstGeom prst="rect">
             <a:avLst/>
@@ -13323,7 +13331,7 @@
           <a:lstStyle/>
           <a:p>
             <a:r>
-              <a:rPr lang="en-US" sz="3200" b="1" dirty="0">
+              <a:rPr lang="en-US" sz="2700" b="1" dirty="0">
                 <a:solidFill>
                   <a:srgbClr val="1F1F1F"/>
                 </a:solidFill>
@@ -13333,7 +13341,7 @@
               </a:rPr>
               <a:t>Phase 6: Graph-Level Summary Features</a:t>
             </a:r>
-            <a:endParaRPr lang="en-US" sz="3200" dirty="0"/>
+            <a:endParaRPr lang="en-US" sz="2700" dirty="0"/>
           </a:p>
         </p:txBody>
       </p:sp>
@@ -14443,7 +14451,7 @@
         </p:nvSpPr>
         <p:spPr>
           <a:xfrm>
-            <a:off x="457200" y="777240"/>
+            <a:off x="457200" y="1143000"/>
             <a:ext cx="8229600" cy="347472"/>
           </a:xfrm>
           <a:prstGeom prst="rect">
@@ -14488,7 +14496,7 @@
         </p:nvSpPr>
         <p:spPr>
           <a:xfrm>
-            <a:off x="457200" y="1143000"/>
+            <a:off x="457200" y="1508760"/>
             <a:ext cx="8229600" cy="548640"/>
           </a:xfrm>
           <a:prstGeom prst="rect">
@@ -14533,7 +14541,7 @@
         </p:nvSpPr>
         <p:spPr>
           <a:xfrm>
-            <a:off x="457200" y="1801368"/>
+            <a:off x="457200" y="2167128"/>
             <a:ext cx="8229600" cy="347472"/>
           </a:xfrm>
           <a:prstGeom prst="rect">
@@ -14578,7 +14586,7 @@
         </p:nvSpPr>
         <p:spPr>
           <a:xfrm>
-            <a:off x="457200" y="2212848"/>
+            <a:off x="457200" y="2578608"/>
             <a:ext cx="1920240" cy="1143000"/>
           </a:xfrm>
           <a:prstGeom prst="roundRect">
@@ -14611,7 +14619,7 @@
         </p:nvSpPr>
         <p:spPr>
           <a:xfrm>
-            <a:off x="457200" y="2331720"/>
+            <a:off x="457200" y="2697480"/>
             <a:ext cx="1920240" cy="548640"/>
           </a:xfrm>
           <a:prstGeom prst="rect">
@@ -14656,7 +14664,7 @@
         </p:nvSpPr>
         <p:spPr>
           <a:xfrm>
-            <a:off x="457200" y="2834640"/>
+            <a:off x="457200" y="3200400"/>
             <a:ext cx="1920240" cy="402336"/>
           </a:xfrm>
           <a:prstGeom prst="rect">
@@ -14701,7 +14709,7 @@
         </p:nvSpPr>
         <p:spPr>
           <a:xfrm>
-            <a:off x="2606040" y="2212848"/>
+            <a:off x="2606040" y="2578608"/>
             <a:ext cx="1920240" cy="1143000"/>
           </a:xfrm>
           <a:prstGeom prst="roundRect">
@@ -14734,7 +14742,7 @@
         </p:nvSpPr>
         <p:spPr>
           <a:xfrm>
-            <a:off x="2606040" y="2331720"/>
+            <a:off x="2606040" y="2697480"/>
             <a:ext cx="1920240" cy="548640"/>
           </a:xfrm>
           <a:prstGeom prst="rect">
@@ -14779,7 +14787,7 @@
         </p:nvSpPr>
         <p:spPr>
           <a:xfrm>
-            <a:off x="2606040" y="2834640"/>
+            <a:off x="2606040" y="3200400"/>
             <a:ext cx="1920240" cy="402336"/>
           </a:xfrm>
           <a:prstGeom prst="rect">
@@ -14824,7 +14832,7 @@
         </p:nvSpPr>
         <p:spPr>
           <a:xfrm>
-            <a:off x="4754880" y="2212848"/>
+            <a:off x="4754880" y="2578608"/>
             <a:ext cx="1920240" cy="1143000"/>
           </a:xfrm>
           <a:prstGeom prst="roundRect">
@@ -14857,7 +14865,7 @@
         </p:nvSpPr>
         <p:spPr>
           <a:xfrm>
-            <a:off x="4754880" y="2331720"/>
+            <a:off x="4754880" y="2697480"/>
             <a:ext cx="1920240" cy="548640"/>
           </a:xfrm>
           <a:prstGeom prst="rect">
@@ -14902,7 +14910,7 @@
         </p:nvSpPr>
         <p:spPr>
           <a:xfrm>
-            <a:off x="4754880" y="2834640"/>
+            <a:off x="4754880" y="3200400"/>
             <a:ext cx="1920240" cy="402336"/>
           </a:xfrm>
           <a:prstGeom prst="rect">
@@ -14947,7 +14955,7 @@
         </p:nvSpPr>
         <p:spPr>
           <a:xfrm>
-            <a:off x="6903720" y="2212848"/>
+            <a:off x="6903720" y="2578608"/>
             <a:ext cx="1920240" cy="1143000"/>
           </a:xfrm>
           <a:prstGeom prst="roundRect">
@@ -14980,7 +14988,7 @@
         </p:nvSpPr>
         <p:spPr>
           <a:xfrm>
-            <a:off x="6903720" y="2331720"/>
+            <a:off x="6903720" y="2697480"/>
             <a:ext cx="1920240" cy="548640"/>
           </a:xfrm>
           <a:prstGeom prst="rect">
@@ -15025,7 +15033,7 @@
         </p:nvSpPr>
         <p:spPr>
           <a:xfrm>
-            <a:off x="6903720" y="2834640"/>
+            <a:off x="6903720" y="3200400"/>
             <a:ext cx="1920240" cy="402336"/>
           </a:xfrm>
           <a:prstGeom prst="rect">
@@ -15070,7 +15078,7 @@
         </p:nvSpPr>
         <p:spPr>
           <a:xfrm>
-            <a:off x="457200" y="3447288"/>
+            <a:off x="457200" y="3813048"/>
             <a:ext cx="8229600" cy="320040"/>
           </a:xfrm>
           <a:prstGeom prst="rect">
@@ -15115,7 +15123,7 @@
         </p:nvSpPr>
         <p:spPr>
           <a:xfrm>
-            <a:off x="457200" y="3813048"/>
+            <a:off x="457200" y="4178808"/>
             <a:ext cx="8229600" cy="1188720"/>
           </a:xfrm>
           <a:prstGeom prst="rect">
@@ -16522,6 +16530,15 @@
 </file>
 
 <file path=customXml/item1.xml><?xml version="1.0" encoding="utf-8"?>
+<?mso-contentType ?>
+<FormTemplates xmlns="http://schemas.microsoft.com/sharepoint/v3/contenttype/forms">
+  <Display>DocumentLibraryForm</Display>
+  <Edit>DocumentLibraryForm</Edit>
+  <New>DocumentLibraryForm</New>
+</FormTemplates>
+</file>
+
+<file path=customXml/item2.xml><?xml version="1.0" encoding="utf-8"?>
 <ct:contentTypeSchema xmlns:ct="http://schemas.microsoft.com/office/2006/metadata/contentType" xmlns:ma="http://schemas.microsoft.com/office/2006/metadata/properties/metaAttributes" ct:_="" ma:_="" ma:contentTypeName="Document" ma:contentTypeID="0x010100CE759F7608B13A4D86BCC979C54BBCCB" ma:contentTypeVersion="3" ma:contentTypeDescription="Create a new document." ma:contentTypeScope="" ma:versionID="562f52eeba954e953f3dbe994cae5a50">
   <xsd:schema xmlns:xsd="http://www.w3.org/2001/XMLSchema" xmlns:xs="http://www.w3.org/2001/XMLSchema" xmlns:p="http://schemas.microsoft.com/office/2006/metadata/properties" xmlns:ns2="08677264-7440-49ce-928a-9917bd2fc905" targetNamespace="http://schemas.microsoft.com/office/2006/metadata/properties" ma:root="true" ma:fieldsID="cfe0b1e2cc427cbe41c2a2bde47cd0a9" ns2:_="">
     <xsd:import namespace="08677264-7440-49ce-928a-9917bd2fc905"/>
@@ -16659,15 +16676,6 @@
 </ct:contentTypeSchema>
 </file>
 
-<file path=customXml/item2.xml><?xml version="1.0" encoding="utf-8"?>
-<?mso-contentType ?>
-<FormTemplates xmlns="http://schemas.microsoft.com/sharepoint/v3/contenttype/forms">
-  <Display>DocumentLibraryForm</Display>
-  <Edit>DocumentLibraryForm</Edit>
-  <New>DocumentLibraryForm</New>
-</FormTemplates>
-</file>
-
 <file path=customXml/item3.xml><?xml version="1.0" encoding="utf-8"?>
 <p:properties xmlns:p="http://schemas.microsoft.com/office/2006/metadata/properties" xmlns:xsi="http://www.w3.org/2001/XMLSchema-instance" xmlns:pc="http://schemas.microsoft.com/office/infopath/2007/PartnerControls">
   <documentManagement/>
@@ -16675,6 +16683,14 @@
 </file>
 
 <file path=customXml/itemProps1.xml><?xml version="1.0" encoding="utf-8"?>
+<ds:datastoreItem xmlns:ds="http://schemas.openxmlformats.org/officeDocument/2006/customXml" ds:itemID="{46C02176-421E-4469-B6C2-6437A9690DAF}">
+  <ds:schemaRefs>
+    <ds:schemaRef ds:uri="http://schemas.microsoft.com/sharepoint/v3/contenttype/forms"/>
+  </ds:schemaRefs>
+</ds:datastoreItem>
+</file>
+
+<file path=customXml/itemProps2.xml><?xml version="1.0" encoding="utf-8"?>
 <ds:datastoreItem xmlns:ds="http://schemas.openxmlformats.org/officeDocument/2006/customXml" ds:itemID="{131EAF09-CD46-4973-8E3F-6CB46C90CA5E}">
   <ds:schemaRefs>
     <ds:schemaRef ds:uri="http://schemas.microsoft.com/office/2006/metadata/contentType"/>
@@ -16692,14 +16708,6 @@
 </ds:datastoreItem>
 </file>
 
-<file path=customXml/itemProps2.xml><?xml version="1.0" encoding="utf-8"?>
-<ds:datastoreItem xmlns:ds="http://schemas.openxmlformats.org/officeDocument/2006/customXml" ds:itemID="{46C02176-421E-4469-B6C2-6437A9690DAF}">
-  <ds:schemaRefs>
-    <ds:schemaRef ds:uri="http://schemas.microsoft.com/sharepoint/v3/contenttype/forms"/>
-  </ds:schemaRefs>
-</ds:datastoreItem>
-</file>
-
 <file path=customXml/itemProps3.xml><?xml version="1.0" encoding="utf-8"?>
 <ds:datastoreItem xmlns:ds="http://schemas.openxmlformats.org/officeDocument/2006/customXml" ds:itemID="{D74ED9B8-9FE6-4BEC-B456-79D1D6C96D7E}">
   <ds:schemaRefs>

--- a/docs/reference_materials/powerpoints/6-30 REU.pptx
+++ b/docs/reference_materials/powerpoints/6-30 REU.pptx
@@ -1214,7 +1214,30 @@
               <a:buFontTx/>
               <a:buChar char="-"/>
             </a:pPr>
-            <a:endParaRPr lang="en-US" dirty="0"/>
+            <a:r>
+              <a:rPr lang="en-US" b="1" dirty="0"/>
+              <a:t>In-distribution:</a:t>
+            </a:r>
+            <a:r>
+              <a:rPr lang="en-US" dirty="0"/>
+              <a:t> Data drawn from the same distribution as the training set. </a:t>
+            </a:r>
+            <a:r>
+              <a:rPr lang="en-US" b="1" dirty="0"/>
+              <a:t>Architecture:</a:t>
+            </a:r>
+            <a:r>
+              <a:rPr lang="en-US" dirty="0"/>
+              <a:t> Overall structure of the neural network, including layers and connections. </a:t>
+            </a:r>
+            <a:r>
+              <a:rPr lang="en-US" b="1" dirty="0"/>
+              <a:t>Objective function:</a:t>
+            </a:r>
+            <a:r>
+              <a:rPr lang="en-US" dirty="0"/>
+              <a:t> Mathematical function minimized during training to guide learning.</a:t>
+            </a:r>
           </a:p>
         </p:txBody>
       </p:sp>
@@ -1332,7 +1355,50 @@
               <a:buFontTx/>
               <a:buChar char="-"/>
             </a:pPr>
-            <a:endParaRPr lang="en-US" dirty="0"/>
+            <a:r>
+              <a:rPr lang="en-US" b="1" dirty="0"/>
+              <a:t>GIN (Graph Isomorphism Network):</a:t>
+            </a:r>
+            <a:r>
+              <a:rPr lang="en-US" dirty="0"/>
+              <a:t> More expressive GNN architecture capable of distinguishing a wider range of graph structures. </a:t>
+            </a:r>
+            <a:r>
+              <a:rPr lang="en-US" b="1" dirty="0" err="1"/>
+              <a:t>GraphSAGE</a:t>
+            </a:r>
+            <a:r>
+              <a:rPr lang="en-US" b="1" dirty="0"/>
+              <a:t>:</a:t>
+            </a:r>
+            <a:r>
+              <a:rPr lang="en-US" dirty="0"/>
+              <a:t> GNN architecture that samples neighboring nodes, making it scalable to larger graphs. </a:t>
+            </a:r>
+            <a:r>
+              <a:rPr lang="en-US" b="1" dirty="0"/>
+              <a:t>Residual connection (skip connection):</a:t>
+            </a:r>
+            <a:r>
+              <a:rPr lang="en-US" dirty="0"/>
+              <a:t> Directly passes information across layers to improve gradient flow in deeper networks. </a:t>
+            </a:r>
+            <a:r>
+              <a:rPr lang="en-US" b="1" dirty="0"/>
+              <a:t>Inductive learning:</a:t>
+            </a:r>
+            <a:r>
+              <a:rPr lang="en-US" dirty="0"/>
+              <a:t> Ability to generalize to graphs not seen during training. </a:t>
+            </a:r>
+            <a:r>
+              <a:rPr lang="en-US" b="1" dirty="0"/>
+              <a:t>Split strategy:</a:t>
+            </a:r>
+            <a:r>
+              <a:rPr lang="en-US" dirty="0"/>
+              <a:t> Method of dividing data into training, validation, and testing sets.</a:t>
+            </a:r>
           </a:p>
         </p:txBody>
       </p:sp>
@@ -1432,7 +1498,38 @@
               <a:buFontTx/>
               <a:buChar char="-"/>
             </a:pPr>
-            <a:endParaRPr lang="en-US" dirty="0"/>
+            <a:r>
+              <a:rPr lang="en-US" b="1" dirty="0"/>
+              <a:t>Graph topology:</a:t>
+            </a:r>
+            <a:r>
+              <a:rPr lang="en-US" dirty="0"/>
+              <a:t> The connectivity pattern between nodes and edges, independent of physical geometry. </a:t>
+            </a:r>
+            <a:r>
+              <a:rPr lang="en-US" b="1" dirty="0"/>
+              <a:t>FEA (Finite Element Analysis):</a:t>
+            </a:r>
+            <a:r>
+              <a:rPr lang="en-US" dirty="0"/>
+              <a:t> A numerical simulation method used to approximate the mechanical behavior of structures. </a:t>
+            </a:r>
+            <a:r>
+              <a:rPr lang="en-US" b="1" dirty="0"/>
+              <a:t>Abaqus:</a:t>
+            </a:r>
+            <a:r>
+              <a:rPr lang="en-US" dirty="0"/>
+              <a:t> Commercial finite element software used to generate stiffness simulations. </a:t>
+            </a:r>
+            <a:r>
+              <a:rPr lang="en-US" b="1" dirty="0"/>
+              <a:t>R² (Coefficient of Determination):</a:t>
+            </a:r>
+            <a:r>
+              <a:rPr lang="en-US" dirty="0"/>
+              <a:t> Measures how much variance in the target is explained by the model; values closer to 1 indicate better predictions.</a:t>
+            </a:r>
           </a:p>
         </p:txBody>
       </p:sp>
@@ -1540,6 +1637,84 @@
           <a:bodyPr/>
           <a:lstStyle/>
           <a:p>
+            <a:r>
+              <a:rPr lang="en-US" b="1" dirty="0"/>
+              <a:t>Hidden dimension:</a:t>
+            </a:r>
+            <a:r>
+              <a:rPr lang="en-US" dirty="0"/>
+              <a:t> Number of learned features each node stores internally between GCN layers. </a:t>
+            </a:r>
+          </a:p>
+          <a:p>
+            <a:r>
+              <a:rPr lang="en-US" b="1" dirty="0"/>
+              <a:t>Adam optimizer:</a:t>
+            </a:r>
+            <a:r>
+              <a:rPr lang="en-US" dirty="0"/>
+              <a:t> Adaptive gradient-based optimization algorithm that adjusts learning rates automatically. </a:t>
+            </a:r>
+          </a:p>
+          <a:p>
+            <a:r>
+              <a:rPr lang="en-US" b="1" dirty="0"/>
+              <a:t>Weight decay:</a:t>
+            </a:r>
+            <a:r>
+              <a:rPr lang="en-US" dirty="0"/>
+              <a:t> Regularization technique that penalizes large model weights to reduce overfitting. </a:t>
+            </a:r>
+          </a:p>
+          <a:p>
+            <a:r>
+              <a:rPr lang="en-US" b="1" dirty="0"/>
+              <a:t>Epoch:</a:t>
+            </a:r>
+            <a:r>
+              <a:rPr lang="en-US" dirty="0"/>
+              <a:t> One complete pass through the training dataset. </a:t>
+            </a:r>
+          </a:p>
+          <a:p>
+            <a:r>
+              <a:rPr lang="en-US" b="1" dirty="0"/>
+              <a:t>Learning rate (</a:t>
+            </a:r>
+            <a:r>
+              <a:rPr lang="en-US" b="1" dirty="0" err="1"/>
+              <a:t>lr</a:t>
+            </a:r>
+            <a:r>
+              <a:rPr lang="en-US" b="1" dirty="0"/>
+              <a:t>):</a:t>
+            </a:r>
+            <a:r>
+              <a:rPr lang="en-US" dirty="0"/>
+              <a:t> Controls the size of each optimization step. </a:t>
+            </a:r>
+          </a:p>
+          <a:p>
+            <a:r>
+              <a:rPr lang="en-US" b="1" dirty="0"/>
+              <a:t>RMSE:</a:t>
+            </a:r>
+            <a:r>
+              <a:rPr lang="en-US" dirty="0"/>
+              <a:t> Root Mean Squared Error; penalizes larger prediction errors more heavily. </a:t>
+            </a:r>
+          </a:p>
+          <a:p>
+            <a:r>
+              <a:rPr lang="en-US" b="1" dirty="0"/>
+              <a:t>MAE:</a:t>
+            </a:r>
+            <a:r>
+              <a:rPr lang="en-US" dirty="0"/>
+              <a:t> Mean Absolute Error; average magnitude of prediction errors. </a:t>
+            </a:r>
+          </a:p>
+          <a:p>
             <a:pPr marL="171450" indent="-171450">
               <a:buFontTx/>
               <a:buChar char="-"/>
@@ -1662,7 +1837,50 @@
               <a:buFontTx/>
               <a:buChar char="-"/>
             </a:pPr>
-            <a:endParaRPr lang="en-US" dirty="0"/>
+            <a:r>
+              <a:rPr lang="en-US" b="1" dirty="0" err="1"/>
+              <a:t>AdamW</a:t>
+            </a:r>
+            <a:r>
+              <a:rPr lang="en-US" b="1" dirty="0"/>
+              <a:t>:</a:t>
+            </a:r>
+            <a:r>
+              <a:rPr lang="en-US" dirty="0"/>
+              <a:t> Variant of Adam that decouples weight decay from gradient updates. </a:t>
+            </a:r>
+            <a:r>
+              <a:rPr lang="en-US" b="1" dirty="0"/>
+              <a:t>SGD (Stochastic Gradient Descent):</a:t>
+            </a:r>
+            <a:r>
+              <a:rPr lang="en-US" dirty="0"/>
+              <a:t> Updates parameters using small batches of data instead of the full dataset. </a:t>
+            </a:r>
+            <a:r>
+              <a:rPr lang="en-US" b="1" dirty="0"/>
+              <a:t>Momentum:</a:t>
+            </a:r>
+            <a:r>
+              <a:rPr lang="en-US" dirty="0"/>
+              <a:t> Uses previous gradients to smooth optimization and accelerate convergence. </a:t>
+            </a:r>
+            <a:r>
+              <a:rPr lang="en-US" b="1" dirty="0"/>
+              <a:t>Nesterov momentum:</a:t>
+            </a:r>
+            <a:r>
+              <a:rPr lang="en-US" dirty="0"/>
+              <a:t> Looks ahead before updating parameters to improve optimization stability. </a:t>
+            </a:r>
+            <a:r>
+              <a:rPr lang="en-US" b="1" dirty="0"/>
+              <a:t>Control experiment:</a:t>
+            </a:r>
+            <a:r>
+              <a:rPr lang="en-US" dirty="0"/>
+              <a:t> Baseline used for fair comparison against modified models.</a:t>
+            </a:r>
           </a:p>
         </p:txBody>
       </p:sp>
@@ -1804,6 +2022,50 @@
               </a:rPr>
               <a:t>Interpretation: Weighted edges preserve real graph information and improve out-of-distribution behavior somewhat, but do not move the held-out test ceiling. Retained for all future runs.</a:t>
             </a:r>
+            <a:r>
+              <a:rPr lang="en-US" b="1" dirty="0"/>
+              <a:t> Adjacency matrix:</a:t>
+            </a:r>
+            <a:r>
+              <a:rPr lang="en-US" dirty="0"/>
+              <a:t> Matrix describing which nodes are connected. </a:t>
+            </a:r>
+            <a:r>
+              <a:rPr lang="en-US" b="1" dirty="0"/>
+              <a:t>Binary edges:</a:t>
+            </a:r>
+            <a:r>
+              <a:rPr lang="en-US" dirty="0"/>
+              <a:t> Connections represented only as present (1) or absent (0). </a:t>
+            </a:r>
+            <a:r>
+              <a:rPr lang="en-US" b="1" dirty="0"/>
+              <a:t>Edge weights:</a:t>
+            </a:r>
+            <a:r>
+              <a:rPr lang="en-US" dirty="0"/>
+              <a:t> Numerical values representing connection strength or physical significance. </a:t>
+            </a:r>
+            <a:r>
+              <a:rPr lang="en-US" b="1" dirty="0" err="1"/>
+              <a:t>GCNConv</a:t>
+            </a:r>
+            <a:r>
+              <a:rPr lang="en-US" b="1" dirty="0"/>
+              <a:t>:</a:t>
+            </a:r>
+            <a:r>
+              <a:rPr lang="en-US" dirty="0"/>
+              <a:t> Graph convolution layer that aggregates information from neighboring nodes. </a:t>
+            </a:r>
+            <a:r>
+              <a:rPr lang="en-US" b="1" dirty="0"/>
+              <a:t>Out-of-distribution:</a:t>
+            </a:r>
+            <a:r>
+              <a:rPr lang="en-US" dirty="0"/>
+              <a:t> Data differing from the training distribution, making prediction more difficult.</a:t>
+            </a:r>
             <a:endParaRPr lang="en-US" sz="1200" dirty="0"/>
           </a:p>
           <a:p>
@@ -1951,16 +2213,63 @@
                 <a:ea typeface="Calibri" pitchFamily="34" charset="-122"/>
                 <a:cs typeface="Calibri" pitchFamily="34" charset="-120"/>
               </a:rPr>
-              <a:t>Strongest single improvement. Confirmed stable across multiple seeds (mean test R²: 0.9380). Best prediction-set generalization baseline.</a:t>
-            </a:r>
-            <a:endParaRPr lang="en-US" sz="1200" dirty="0"/>
-          </a:p>
-          <a:p>
-            <a:pPr marL="171450" indent="-171450">
-              <a:buFontTx/>
-              <a:buChar char="-"/>
-            </a:pPr>
-            <a:endParaRPr lang="en-US" dirty="0"/>
+              <a:t>Strongest single improvement. Confirmed stable across multiple seeds (mean test R²: 0.9380). Best prediction-set generalization </a:t>
+            </a:r>
+            <a:r>
+              <a:rPr lang="en-US" sz="1200" i="1" dirty="0" err="1">
+                <a:solidFill>
+                  <a:srgbClr val="555555"/>
+                </a:solidFill>
+                <a:latin typeface="Calibri" pitchFamily="34" charset="0"/>
+                <a:ea typeface="Calibri" pitchFamily="34" charset="-122"/>
+                <a:cs typeface="Calibri" pitchFamily="34" charset="-120"/>
+              </a:rPr>
+              <a:t>baseline</a:t>
+            </a:r>
+            <a:r>
+              <a:rPr lang="en-US" b="1" dirty="0" err="1"/>
+              <a:t>Node</a:t>
+            </a:r>
+            <a:r>
+              <a:rPr lang="en-US" b="1" dirty="0"/>
+              <a:t> degree:</a:t>
+            </a:r>
+            <a:r>
+              <a:rPr lang="en-US" dirty="0"/>
+              <a:t> Number of edges connected to a node. </a:t>
+            </a:r>
+            <a:r>
+              <a:rPr lang="en-US" b="1" dirty="0"/>
+              <a:t>Weighted degree:</a:t>
+            </a:r>
+            <a:r>
+              <a:rPr lang="en-US" dirty="0"/>
+              <a:t> Sum of edge weights connected to a node. </a:t>
+            </a:r>
+            <a:r>
+              <a:rPr lang="en-US" b="1" dirty="0"/>
+              <a:t>Boundary indicator:</a:t>
+            </a:r>
+            <a:r>
+              <a:rPr lang="en-US" dirty="0"/>
+              <a:t> Binary feature identifying whether a node lies on the specimen boundary. </a:t>
+            </a:r>
+            <a:r>
+              <a:rPr lang="en-US" b="1" dirty="0"/>
+              <a:t>Incident edge:</a:t>
+            </a:r>
+            <a:r>
+              <a:rPr lang="en-US" dirty="0"/>
+              <a:t> Any edge directly connected to a node. </a:t>
+            </a:r>
+            <a:r>
+              <a:rPr lang="en-US" b="1" dirty="0"/>
+              <a:t>Feature engineering:</a:t>
+            </a:r>
+            <a:r>
+              <a:rPr lang="en-US" dirty="0"/>
+              <a:t> Creating informative input features to improve model performance.</a:t>
+            </a:r>
           </a:p>
         </p:txBody>
       </p:sp>
@@ -2074,6 +2383,46 @@
           <a:bodyPr/>
           <a:lstStyle/>
           <a:p>
+            <a:r>
+              <a:rPr lang="en-US" b="1" dirty="0"/>
+              <a:t>Random seed:</a:t>
+            </a:r>
+            <a:r>
+              <a:rPr lang="en-US" dirty="0"/>
+              <a:t> Controls random initialization for reproducible experiments. </a:t>
+            </a:r>
+          </a:p>
+          <a:p>
+            <a:r>
+              <a:rPr lang="en-US" b="1" dirty="0"/>
+              <a:t>Variance:</a:t>
+            </a:r>
+            <a:r>
+              <a:rPr lang="en-US" dirty="0"/>
+              <a:t> Natural performance differences caused by random initialization or data ordering. </a:t>
+            </a:r>
+          </a:p>
+          <a:p>
+            <a:r>
+              <a:rPr lang="en-US" b="1" dirty="0"/>
+              <a:t>Held-out test set:</a:t>
+            </a:r>
+            <a:r>
+              <a:rPr lang="en-US" dirty="0"/>
+              <a:t> Data never seen during training, used for unbiased evaluation. </a:t>
+            </a:r>
+          </a:p>
+          <a:p>
+            <a:r>
+              <a:rPr lang="en-US" b="1" dirty="0"/>
+              <a:t>Generalization:</a:t>
+            </a:r>
+            <a:r>
+              <a:rPr lang="en-US" dirty="0"/>
+              <a:t> Ability of a model to perform well on unseen data. </a:t>
+            </a:r>
+          </a:p>
+          <a:p>
             <a:pPr marL="171450" indent="-171450">
               <a:buFontTx/>
               <a:buChar char="-"/>
@@ -2192,11 +2541,81 @@
           <a:bodyPr/>
           <a:lstStyle/>
           <a:p>
+            <a:pPr marL="171450" marR="0" lvl="0" indent="-171450" algn="l" defTabSz="914400" rtl="0" eaLnBrk="0" fontAlgn="base" latinLnBrk="0" hangingPunct="0">
+              <a:lnSpc>
+                <a:spcPct val="100000"/>
+              </a:lnSpc>
+              <a:spcBef>
+                <a:spcPct val="30000"/>
+              </a:spcBef>
+              <a:spcAft>
+                <a:spcPct val="0"/>
+              </a:spcAft>
+              <a:buClrTx/>
+              <a:buSzTx/>
+              <a:buFontTx/>
+              <a:buChar char="-"/>
+              <a:tabLst/>
+              <a:defRPr/>
+            </a:pPr>
+            <a:r>
+              <a:rPr lang="en-US" sz="1200" i="1" dirty="0">
+                <a:solidFill>
+                  <a:srgbClr val="555555"/>
+                </a:solidFill>
+                <a:latin typeface="Calibri" pitchFamily="34" charset="0"/>
+                <a:ea typeface="Calibri" pitchFamily="34" charset="-122"/>
+                <a:cs typeface="Calibri" pitchFamily="34" charset="-120"/>
+              </a:rPr>
+              <a:t>Marginal improvement on held-out test; prediction-set R² declined. Graph features help in-distribution fit but do not yet resolve out-of-distribution robustness.</a:t>
+            </a:r>
+            <a:endParaRPr lang="en-US" sz="1200" dirty="0"/>
+          </a:p>
+          <a:p>
             <a:pPr marL="171450" indent="-171450">
               <a:buFontTx/>
               <a:buChar char="-"/>
             </a:pPr>
-            <a:endParaRPr lang="en-US" dirty="0"/>
+            <a:r>
+              <a:rPr lang="en-US" b="1" dirty="0"/>
+              <a:t>Graph density:</a:t>
+            </a:r>
+            <a:r>
+              <a:rPr lang="en-US" dirty="0"/>
+              <a:t> Fraction of possible edges that actually exist. </a:t>
+            </a:r>
+            <a:r>
+              <a:rPr lang="en-US" b="1" dirty="0"/>
+              <a:t>Pooling:</a:t>
+            </a:r>
+            <a:r>
+              <a:rPr lang="en-US" dirty="0"/>
+              <a:t> Combines node-level information into a single graph representation. </a:t>
+            </a:r>
+            <a:r>
+              <a:rPr lang="en-US" b="1" dirty="0"/>
+              <a:t>Concatenation:</a:t>
+            </a:r>
+            <a:r>
+              <a:rPr lang="en-US" dirty="0"/>
+              <a:t> Joining multiple feature vectors into one larger vector. </a:t>
+            </a:r>
+            <a:r>
+              <a:rPr lang="en-US" b="1" dirty="0"/>
+              <a:t>Normalization:</a:t>
+            </a:r>
+            <a:r>
+              <a:rPr lang="en-US" dirty="0"/>
+              <a:t> Scaling features to comparable ranges for more stable training. </a:t>
+            </a:r>
+            <a:r>
+              <a:rPr lang="en-US" b="1" dirty="0"/>
+              <a:t>Standard deviation (std):</a:t>
+            </a:r>
+            <a:r>
+              <a:rPr lang="en-US" dirty="0"/>
+              <a:t> Measures variability within a set of values.</a:t>
+            </a:r>
           </a:p>
         </p:txBody>
       </p:sp>
@@ -2314,7 +2733,38 @@
               <a:buFontTx/>
               <a:buChar char="-"/>
             </a:pPr>
-            <a:endParaRPr lang="en-US" dirty="0"/>
+            <a:r>
+              <a:rPr lang="en-US" b="1" dirty="0"/>
+              <a:t>Regression target:</a:t>
+            </a:r>
+            <a:r>
+              <a:rPr lang="en-US" dirty="0"/>
+              <a:t> Continuous value the model is trained to predict (stiffness). </a:t>
+            </a:r>
+            <a:r>
+              <a:rPr lang="en-US" b="1" dirty="0"/>
+              <a:t>Target normalization:</a:t>
+            </a:r>
+            <a:r>
+              <a:rPr lang="en-US" dirty="0"/>
+              <a:t> Scaling output values before training to improve optimization. </a:t>
+            </a:r>
+            <a:r>
+              <a:rPr lang="en-US" b="1" dirty="0"/>
+              <a:t>Robustness:</a:t>
+            </a:r>
+            <a:r>
+              <a:rPr lang="en-US" dirty="0"/>
+              <a:t> Ability of the model to maintain performance under different conditions. </a:t>
+            </a:r>
+            <a:r>
+              <a:rPr lang="en-US" b="1" dirty="0"/>
+              <a:t>Tradeoff:</a:t>
+            </a:r>
+            <a:r>
+              <a:rPr lang="en-US" dirty="0"/>
+              <a:t> Improving one performance metric while another may decrease.</a:t>
+            </a:r>
           </a:p>
         </p:txBody>
       </p:sp>
@@ -3834,7 +4284,7 @@
             <a:pPr algn="ctr" eaLnBrk="1" hangingPunct="1"/>
             <a:r>
               <a:rPr lang="en-US" sz="1050" b="1" dirty="0"/>
-              <a:t>June 9</a:t>
+              <a:t>June 30</a:t>
             </a:r>
             <a:r>
               <a:rPr lang="en-US" sz="1050" b="1" baseline="30000" dirty="0"/>
@@ -7809,7 +8259,7 @@
                 <a:ea typeface="Calibri" pitchFamily="34" charset="-122"/>
                 <a:cs typeface="Calibri" pitchFamily="34" charset="-120"/>
               </a:rPr>
-              <a:t>Phases 1-2: Optimizer comparison (AdamW, SGD)  —  Adam remains best</a:t>
+              <a:t>Phases 1-2: Optimizer comparison (AdamW, SGD) | Adam remains best</a:t>
             </a:r>
             <a:endParaRPr lang="en-US" sz="1300" dirty="0"/>
           </a:p>
@@ -9078,7 +9528,7 @@
                 <a:ea typeface="Calibri" pitchFamily="34" charset="-122"/>
                 <a:cs typeface="Calibri" pitchFamily="34" charset="-120"/>
               </a:rPr>
-              <a:t>All optimizers performed much worse than</a:t>
+              <a:t>All optimizers performed worse than baseline</a:t>
             </a:r>
             <a:endParaRPr lang="en-US" sz="1400" dirty="0"/>
           </a:p>
@@ -9144,7 +9594,7 @@
           <p:nvPr>
             <p:extLst>
               <p:ext uri="{D42A27DB-BD31-4B8C-83A1-F6EECF244321}">
-                <p14:modId xmlns:p14="http://schemas.microsoft.com/office/powerpoint/2010/main" val="1532875647"/>
+                <p14:modId xmlns:p14="http://schemas.microsoft.com/office/powerpoint/2010/main" val="2484302057"/>
               </p:ext>
             </p:extLst>
           </p:nvPr>
@@ -9545,7 +9995,7 @@
                           <a:ea typeface="Calibri" pitchFamily="34" charset="-122"/>
                           <a:cs typeface="Calibri" pitchFamily="34" charset="-120"/>
                         </a:rPr>
-                        <a:t>Best — matches baseline exactly</a:t>
+                        <a:t>Baseline</a:t>
                       </a:r>
                       <a:endParaRPr lang="en-US" sz="1300" dirty="0">
                         <a:latin typeface="Calibri" charset="0"/>
@@ -11240,51 +11690,6 @@
           </a:p>
         </p:txBody>
       </p:sp>
-      <p:sp>
-        <p:nvSpPr>
-          <p:cNvPr id="47" name="Text 25">
-            <a:extLst>
-              <a:ext uri="{FF2B5EF4-FFF2-40B4-BE49-F238E27FC236}">
-                <a16:creationId xmlns:a16="http://schemas.microsoft.com/office/drawing/2014/main" id="{3C4332ED-BD0C-46CB-47E8-179CBA9B1BF8}"/>
-              </a:ext>
-            </a:extLst>
-          </p:cNvPr>
-          <p:cNvSpPr/>
-          <p:nvPr/>
-        </p:nvSpPr>
-        <p:spPr>
-          <a:xfrm>
-            <a:off x="457200" y="4949952"/>
-            <a:ext cx="8412480" cy="384048"/>
-          </a:xfrm>
-          <a:prstGeom prst="rect">
-            <a:avLst/>
-          </a:prstGeom>
-          <a:noFill/>
-          <a:ln/>
-        </p:spPr>
-        <p:txBody>
-          <a:bodyPr wrap="square" rtlCol="0" anchor="ctr"/>
-          <a:lstStyle/>
-          <a:p>
-            <a:pPr marL="0" indent="0">
-              <a:buNone/>
-            </a:pPr>
-            <a:r>
-              <a:rPr lang="en-US" sz="1200" i="1" dirty="0">
-                <a:solidFill>
-                  <a:srgbClr val="555555"/>
-                </a:solidFill>
-                <a:latin typeface="Calibri" pitchFamily="34" charset="0"/>
-                <a:ea typeface="Calibri" pitchFamily="34" charset="-122"/>
-                <a:cs typeface="Calibri" pitchFamily="34" charset="-120"/>
-              </a:rPr>
-              <a:t>Interpretation: Weighted edges preserve real graph information and improve out-of-distribution behavior somewhat, but do not move the held-out test ceiling. Retained for all future runs.</a:t>
-            </a:r>
-            <a:endParaRPr lang="en-US" sz="1200" dirty="0"/>
-          </a:p>
-        </p:txBody>
-      </p:sp>
     </p:spTree>
     <p:extLst>
       <p:ext uri="{BB962C8B-B14F-4D97-AF65-F5344CB8AC3E}">
@@ -14267,51 +14672,6 @@
               <a:t>0.4035</a:t>
             </a:r>
             <a:endParaRPr lang="en-US" sz="2000" dirty="0"/>
-          </a:p>
-        </p:txBody>
-      </p:sp>
-      <p:sp>
-        <p:nvSpPr>
-          <p:cNvPr id="45" name="Text 24">
-            <a:extLst>
-              <a:ext uri="{FF2B5EF4-FFF2-40B4-BE49-F238E27FC236}">
-                <a16:creationId xmlns:a16="http://schemas.microsoft.com/office/drawing/2014/main" id="{06E2D60D-6977-0180-D106-47CF9D35CE4A}"/>
-              </a:ext>
-            </a:extLst>
-          </p:cNvPr>
-          <p:cNvSpPr/>
-          <p:nvPr/>
-        </p:nvSpPr>
-        <p:spPr>
-          <a:xfrm>
-            <a:off x="457200" y="5105400"/>
-            <a:ext cx="8412480" cy="347472"/>
-          </a:xfrm>
-          <a:prstGeom prst="rect">
-            <a:avLst/>
-          </a:prstGeom>
-          <a:noFill/>
-          <a:ln/>
-        </p:spPr>
-        <p:txBody>
-          <a:bodyPr wrap="square" rtlCol="0" anchor="ctr"/>
-          <a:lstStyle/>
-          <a:p>
-            <a:pPr marL="0" indent="0">
-              <a:buNone/>
-            </a:pPr>
-            <a:r>
-              <a:rPr lang="en-US" sz="1200" i="1" dirty="0">
-                <a:solidFill>
-                  <a:srgbClr val="555555"/>
-                </a:solidFill>
-                <a:latin typeface="Calibri" pitchFamily="34" charset="0"/>
-                <a:ea typeface="Calibri" pitchFamily="34" charset="-122"/>
-                <a:cs typeface="Calibri" pitchFamily="34" charset="-120"/>
-              </a:rPr>
-              <a:t>Marginal improvement on held-out test; prediction-set R² declined. Graph features help in-distribution fit but do not yet resolve out-of-distribution robustness.</a:t>
-            </a:r>
-            <a:endParaRPr lang="en-US" sz="1200" dirty="0"/>
           </a:p>
         </p:txBody>
       </p:sp>

--- a/docs/reference_materials/powerpoints/6-30 REU.pptx
+++ b/docs/reference_materials/powerpoints/6-30 REU.pptx
@@ -7921,84 +7921,6 @@
           </a:p>
         </p:txBody>
       </p:sp>
-      <p:sp>
-        <p:nvSpPr>
-          <p:cNvPr id="33" name="Shape 18">
-            <a:extLst>
-              <a:ext uri="{FF2B5EF4-FFF2-40B4-BE49-F238E27FC236}">
-                <a16:creationId xmlns:a16="http://schemas.microsoft.com/office/drawing/2014/main" id="{BE9E69FC-D2D2-CF3E-6E12-07EE9D42A9A6}"/>
-              </a:ext>
-            </a:extLst>
-          </p:cNvPr>
-          <p:cNvSpPr/>
-          <p:nvPr/>
-        </p:nvSpPr>
-        <p:spPr>
-          <a:xfrm>
-            <a:off x="4846320" y="4751832"/>
-            <a:ext cx="3931920" cy="658368"/>
-          </a:xfrm>
-          <a:prstGeom prst="roundRect">
-            <a:avLst>
-              <a:gd name="adj" fmla="val 11111"/>
-            </a:avLst>
-          </a:prstGeom>
-          <a:solidFill>
-            <a:srgbClr val="FFF3CD"/>
-          </a:solidFill>
-          <a:ln w="12700">
-            <a:solidFill>
-              <a:srgbClr val="FFEAA7"/>
-            </a:solidFill>
-            <a:prstDash val="solid"/>
-          </a:ln>
-        </p:spPr>
-      </p:sp>
-      <p:sp>
-        <p:nvSpPr>
-          <p:cNvPr id="35" name="Text 19">
-            <a:extLst>
-              <a:ext uri="{FF2B5EF4-FFF2-40B4-BE49-F238E27FC236}">
-                <a16:creationId xmlns:a16="http://schemas.microsoft.com/office/drawing/2014/main" id="{F53ADD15-1D9D-1448-2681-5D8D4EBE435D}"/>
-              </a:ext>
-            </a:extLst>
-          </p:cNvPr>
-          <p:cNvSpPr/>
-          <p:nvPr/>
-        </p:nvSpPr>
-        <p:spPr>
-          <a:xfrm>
-            <a:off x="4983480" y="4800600"/>
-            <a:ext cx="3657600" cy="594360"/>
-          </a:xfrm>
-          <a:prstGeom prst="rect">
-            <a:avLst/>
-          </a:prstGeom>
-          <a:noFill/>
-          <a:ln/>
-        </p:spPr>
-        <p:txBody>
-          <a:bodyPr wrap="square" rtlCol="0" anchor="ctr"/>
-          <a:lstStyle/>
-          <a:p>
-            <a:pPr marL="0" indent="0">
-              <a:buNone/>
-            </a:pPr>
-            <a:r>
-              <a:rPr lang="en-US" sz="1150" dirty="0">
-                <a:solidFill>
-                  <a:srgbClr val="5D4037"/>
-                </a:solidFill>
-                <a:latin typeface="Calibri" pitchFamily="34" charset="0"/>
-                <a:ea typeface="Calibri" pitchFamily="34" charset="-122"/>
-                <a:cs typeface="Calibri" pitchFamily="34" charset="-120"/>
-              </a:rPr>
-              <a:t>Objective-Level: consider split strategy review and alternate target scaling if prediction-set mismatch appears structural.</a:t>
-            </a:r>
-            <a:endParaRPr lang="en-US" sz="1150" dirty="0"/>
-          </a:p>
-        </p:txBody>
-      </p:sp>
     </p:spTree>
     <p:extLst>
       <p:ext uri="{BB962C8B-B14F-4D97-AF65-F5344CB8AC3E}">
@@ -16890,15 +16812,6 @@
 </file>
 
 <file path=customXml/item1.xml><?xml version="1.0" encoding="utf-8"?>
-<?mso-contentType ?>
-<FormTemplates xmlns="http://schemas.microsoft.com/sharepoint/v3/contenttype/forms">
-  <Display>DocumentLibraryForm</Display>
-  <Edit>DocumentLibraryForm</Edit>
-  <New>DocumentLibraryForm</New>
-</FormTemplates>
-</file>
-
-<file path=customXml/item2.xml><?xml version="1.0" encoding="utf-8"?>
 <ct:contentTypeSchema xmlns:ct="http://schemas.microsoft.com/office/2006/metadata/contentType" xmlns:ma="http://schemas.microsoft.com/office/2006/metadata/properties/metaAttributes" ct:_="" ma:_="" ma:contentTypeName="Document" ma:contentTypeID="0x010100CE759F7608B13A4D86BCC979C54BBCCB" ma:contentTypeVersion="3" ma:contentTypeDescription="Create a new document." ma:contentTypeScope="" ma:versionID="562f52eeba954e953f3dbe994cae5a50">
   <xsd:schema xmlns:xsd="http://www.w3.org/2001/XMLSchema" xmlns:xs="http://www.w3.org/2001/XMLSchema" xmlns:p="http://schemas.microsoft.com/office/2006/metadata/properties" xmlns:ns2="08677264-7440-49ce-928a-9917bd2fc905" targetNamespace="http://schemas.microsoft.com/office/2006/metadata/properties" ma:root="true" ma:fieldsID="cfe0b1e2cc427cbe41c2a2bde47cd0a9" ns2:_="">
     <xsd:import namespace="08677264-7440-49ce-928a-9917bd2fc905"/>
@@ -17036,6 +16949,15 @@
 </ct:contentTypeSchema>
 </file>
 
+<file path=customXml/item2.xml><?xml version="1.0" encoding="utf-8"?>
+<?mso-contentType ?>
+<FormTemplates xmlns="http://schemas.microsoft.com/sharepoint/v3/contenttype/forms">
+  <Display>DocumentLibraryForm</Display>
+  <Edit>DocumentLibraryForm</Edit>
+  <New>DocumentLibraryForm</New>
+</FormTemplates>
+</file>
+
 <file path=customXml/item3.xml><?xml version="1.0" encoding="utf-8"?>
 <p:properties xmlns:p="http://schemas.microsoft.com/office/2006/metadata/properties" xmlns:xsi="http://www.w3.org/2001/XMLSchema-instance" xmlns:pc="http://schemas.microsoft.com/office/infopath/2007/PartnerControls">
   <documentManagement/>
@@ -17043,14 +16965,6 @@
 </file>
 
 <file path=customXml/itemProps1.xml><?xml version="1.0" encoding="utf-8"?>
-<ds:datastoreItem xmlns:ds="http://schemas.openxmlformats.org/officeDocument/2006/customXml" ds:itemID="{46C02176-421E-4469-B6C2-6437A9690DAF}">
-  <ds:schemaRefs>
-    <ds:schemaRef ds:uri="http://schemas.microsoft.com/sharepoint/v3/contenttype/forms"/>
-  </ds:schemaRefs>
-</ds:datastoreItem>
-</file>
-
-<file path=customXml/itemProps2.xml><?xml version="1.0" encoding="utf-8"?>
 <ds:datastoreItem xmlns:ds="http://schemas.openxmlformats.org/officeDocument/2006/customXml" ds:itemID="{131EAF09-CD46-4973-8E3F-6CB46C90CA5E}">
   <ds:schemaRefs>
     <ds:schemaRef ds:uri="http://schemas.microsoft.com/office/2006/metadata/contentType"/>
@@ -17068,6 +16982,14 @@
 </ds:datastoreItem>
 </file>
 
+<file path=customXml/itemProps2.xml><?xml version="1.0" encoding="utf-8"?>
+<ds:datastoreItem xmlns:ds="http://schemas.openxmlformats.org/officeDocument/2006/customXml" ds:itemID="{46C02176-421E-4469-B6C2-6437A9690DAF}">
+  <ds:schemaRefs>
+    <ds:schemaRef ds:uri="http://schemas.microsoft.com/sharepoint/v3/contenttype/forms"/>
+  </ds:schemaRefs>
+</ds:datastoreItem>
+</file>
+
 <file path=customXml/itemProps3.xml><?xml version="1.0" encoding="utf-8"?>
 <ds:datastoreItem xmlns:ds="http://schemas.openxmlformats.org/officeDocument/2006/customXml" ds:itemID="{D74ED9B8-9FE6-4BEC-B456-79D1D6C96D7E}">
   <ds:schemaRefs>
